--- a/备选资产/结构图/同心能力系统-001/example.pptx
+++ b/备选资产/结构图/同心能力系统-001/example.pptx
@@ -2,13 +2,13 @@
 <file path=ppt/presentation.xml><?xml version="1.0" encoding="utf-8"?>
 <p:presentation xmlns:p="http://schemas.openxmlformats.org/presentationml/2006/main">
   <p:sldMasterIdLst>
-    <p:sldMasterId xmlns:r="http://schemas.openxmlformats.org/officeDocument/2006/relationships" id="2147483648" r:id="Rcb33573ca74b4ec0"/>
+    <p:sldMasterId xmlns:r="http://schemas.openxmlformats.org/officeDocument/2006/relationships" id="2147483648" r:id="Re7ac06bee2104d43"/>
   </p:sldMasterIdLst>
   <p:notesMasterIdLst>
-    <p:notesMasterId xmlns:r="http://schemas.openxmlformats.org/officeDocument/2006/relationships" r:id="R193d20d4f6d34e0b"/>
+    <p:notesMasterId xmlns:r="http://schemas.openxmlformats.org/officeDocument/2006/relationships" r:id="R2ae2867f7b174cca"/>
   </p:notesMasterIdLst>
   <p:sldIdLst>
-    <p:sldId xmlns:r="http://schemas.openxmlformats.org/officeDocument/2006/relationships" id="256" r:id="Rffe21f19c2924872"/>
+    <p:sldId xmlns:r="http://schemas.openxmlformats.org/officeDocument/2006/relationships" id="256" r:id="R55b5b886a55f4b7f"/>
   </p:sldIdLst>
   <p:sldSz cx="12192000" cy="6858000"/>
   <p:notesSz cx="6858000" cy="9144000"/>
@@ -506,7 +506,7 @@
   </p:cSld>
   <p:clrMap bg1="lt1" tx1="dk1" bg2="lt2" tx2="dk2" accent1="accent1" accent2="accent2" accent3="accent3" accent4="accent4" accent5="accent5" accent6="accent6" hlink="hlink" folHlink="folHlink"/>
   <p:sldLayoutIdLst>
-    <p:sldLayoutId xmlns:r="http://schemas.openxmlformats.org/officeDocument/2006/relationships" id="2147483649" r:id="R16fa97e4d9584ea3"/>
+    <p:sldLayoutId xmlns:r="http://schemas.openxmlformats.org/officeDocument/2006/relationships" id="2147483649" r:id="Rcb1d8c78937f4514"/>
   </p:sldLayoutIdLst>
   <p:txStyles>
     <p:titleStyle>
@@ -1054,10 +1054,10 @@
       </p:grpSpPr>
       <p:sp>
         <p:nvSpPr>
-          <p:cNvPr id="13" name="">
+          <p:cNvPr id="15" name="">
             <a:extLst xmlns:a="http://schemas.openxmlformats.org/drawingml/2006/main">
               <a:ext uri="{FF2B5EF4-FFF2-40B4-BE49-F238E27FC236}">
-                <a16:creationId xmlns:a16="http://schemas.microsoft.com/office/drawing/2014/main" id="{28507467-8251-4435-99A2-F592DA005137}"/>
+                <a16:creationId xmlns:a16="http://schemas.microsoft.com/office/drawing/2014/main" id="{AC2596F8-B2D1-4645-AF20-3A8EEA5E8B65}"/>
               </a:ext>
             </a:extLst>
           </p:cNvPr>
@@ -1115,7 +1115,7 @@
           <p:cNvPr id="2" name="">
             <a:extLst xmlns:a="http://schemas.openxmlformats.org/drawingml/2006/main">
               <a:ext uri="{FF2B5EF4-FFF2-40B4-BE49-F238E27FC236}">
-                <a16:creationId xmlns:a16="http://schemas.microsoft.com/office/drawing/2014/main" id="{40DFDEEC-2CE7-474D-92AA-B624129D83A3}"/>
+                <a16:creationId xmlns:a16="http://schemas.microsoft.com/office/drawing/2014/main" id="{8798394F-96AC-4965-8919-EAA4BDE03D4E}"/>
               </a:ext>
             </a:extLst>
           </p:cNvPr>
@@ -1173,7 +1173,7 @@
           <p:cNvPr id="3" name="">
             <a:extLst xmlns:a="http://schemas.openxmlformats.org/drawingml/2006/main">
               <a:ext uri="{FF2B5EF4-FFF2-40B4-BE49-F238E27FC236}">
-                <a16:creationId xmlns:a16="http://schemas.microsoft.com/office/drawing/2014/main" id="{7D7851C7-68BA-40B3-95D7-968492D6B122}"/>
+                <a16:creationId xmlns:a16="http://schemas.microsoft.com/office/drawing/2014/main" id="{327B5C22-29D3-4FED-B9FC-FDB95FD3AA18}"/>
               </a:ext>
             </a:extLst>
           </p:cNvPr>
@@ -1184,18 +1184,197 @@
         </p:nvSpPr>
         <p:spPr>
           <a:xfrm xmlns:a="http://schemas.openxmlformats.org/drawingml/2006/main">
-            <a:off x="800100" y="1809750"/>
-            <a:ext cx="10591800" cy="3905250"/>
+            <a:off x="952500" y="5086350"/>
+            <a:ext cx="10287000" cy="876300"/>
           </a:xfrm>
           <a:prstGeom xmlns:a="http://schemas.openxmlformats.org/drawingml/2006/main" prst="ellipse">
             <a:avLst/>
           </a:prstGeom>
           <a:solidFill xmlns:a="http://schemas.openxmlformats.org/drawingml/2006/main">
-            <a:srgbClr val="2B689D"/>
-          </a:solidFill>
+            <a:srgbClr val="123D63">
+              <a:alpha val="18000"/>
+            </a:srgbClr>
+          </a:solidFill>
+          <a:ln xmlns:a="http://schemas.openxmlformats.org/drawingml/2006/main" w="0">
+            <a:noFill/>
+            <a:prstDash val="solid"/>
+          </a:ln>
+        </p:spPr>
+      </p:sp>
+      <p:sp>
+        <p:nvSpPr>
+          <p:cNvPr id="4" name="">
+            <a:extLst xmlns:a="http://schemas.openxmlformats.org/drawingml/2006/main">
+              <a:ext uri="{FF2B5EF4-FFF2-40B4-BE49-F238E27FC236}">
+                <a16:creationId xmlns:a16="http://schemas.microsoft.com/office/drawing/2014/main" id="{08E46D85-7374-497A-BEDC-B79472830ACC}"/>
+              </a:ext>
+            </a:extLst>
+          </p:cNvPr>
+          <p:cNvSpPr>
+            <a:spLocks xmlns:a="http://schemas.openxmlformats.org/drawingml/2006/main" noGrp="1"/>
+          </p:cNvSpPr>
+          <p:nvPr/>
+        </p:nvSpPr>
+        <p:spPr>
+          <a:xfrm xmlns:a="http://schemas.openxmlformats.org/drawingml/2006/main">
+            <a:off x="628650" y="1771650"/>
+            <a:ext cx="10934700" cy="3848100"/>
+          </a:xfrm>
+          <a:prstGeom xmlns:a="http://schemas.openxmlformats.org/drawingml/2006/main" prst="ellipse">
+            <a:avLst/>
+          </a:prstGeom>
+          <a:gradFill xmlns:a="http://schemas.openxmlformats.org/drawingml/2006/main">
+            <a:gsLst>
+              <a:gs pos="0">
+                <a:srgbClr val="1E5C92"/>
+              </a:gs>
+              <a:gs pos="48000">
+                <a:srgbClr val="397DB3"/>
+              </a:gs>
+              <a:gs pos="100000">
+                <a:srgbClr val="174A75"/>
+              </a:gs>
+            </a:gsLst>
+            <a:lin ang="10800000"/>
+          </a:gradFill>
+          <a:ln xmlns:a="http://schemas.openxmlformats.org/drawingml/2006/main" w="14288">
+            <a:solidFill>
+              <a:srgbClr val="D8EAF7"/>
+            </a:solidFill>
+            <a:prstDash val="solid"/>
+          </a:ln>
+        </p:spPr>
+        <p:style>
+          <a:lnRef xmlns:a="http://schemas.openxmlformats.org/drawingml/2006/main" idx="0"/>
+          <a:fillRef xmlns:a="http://schemas.openxmlformats.org/drawingml/2006/main" idx="0"/>
+          <a:effectRef xmlns:a="http://schemas.openxmlformats.org/drawingml/2006/main" idx="7"/>
+          <a:fontRef xmlns:a="http://schemas.openxmlformats.org/drawingml/2006/main" idx="major"/>
+        </p:style>
+      </p:sp>
+      <p:sp>
+        <p:nvSpPr>
+          <p:cNvPr id="5" name="">
+            <a:extLst xmlns:a="http://schemas.openxmlformats.org/drawingml/2006/main">
+              <a:ext uri="{FF2B5EF4-FFF2-40B4-BE49-F238E27FC236}">
+                <a16:creationId xmlns:a16="http://schemas.microsoft.com/office/drawing/2014/main" id="{DB8A9C6B-EC6D-46C8-B56B-18B28ED67C81}"/>
+              </a:ext>
+            </a:extLst>
+          </p:cNvPr>
+          <p:cNvSpPr>
+            <a:spLocks xmlns:a="http://schemas.openxmlformats.org/drawingml/2006/main" noGrp="1"/>
+          </p:cNvSpPr>
+          <p:nvPr/>
+        </p:nvSpPr>
+        <p:spPr>
+          <a:xfrm xmlns:a="http://schemas.openxmlformats.org/drawingml/2006/main">
+            <a:off x="2076450" y="2362200"/>
+            <a:ext cx="8039100" cy="2686050"/>
+          </a:xfrm>
+          <a:prstGeom xmlns:a="http://schemas.openxmlformats.org/drawingml/2006/main" prst="ellipse">
+            <a:avLst/>
+          </a:prstGeom>
+          <a:gradFill xmlns:a="http://schemas.openxmlformats.org/drawingml/2006/main">
+            <a:gsLst>
+              <a:gs pos="0">
+                <a:srgbClr val="FFFFFF"/>
+              </a:gs>
+              <a:gs pos="100000">
+                <a:srgbClr val="F5EEE8"/>
+              </a:gs>
+            </a:gsLst>
+            <a:lin ang="10800000"/>
+          </a:gradFill>
+          <a:ln xmlns:a="http://schemas.openxmlformats.org/drawingml/2006/main" w="14288">
+            <a:solidFill>
+              <a:srgbClr val="E0B18E"/>
+            </a:solidFill>
+            <a:prstDash val="solid"/>
+          </a:ln>
+        </p:spPr>
+      </p:sp>
+      <p:sp>
+        <p:nvSpPr>
+          <p:cNvPr id="6" name="">
+            <a:extLst xmlns:a="http://schemas.openxmlformats.org/drawingml/2006/main">
+              <a:ext uri="{FF2B5EF4-FFF2-40B4-BE49-F238E27FC236}">
+                <a16:creationId xmlns:a16="http://schemas.microsoft.com/office/drawing/2014/main" id="{531B0C94-3024-4EB2-9D20-BFF466854201}"/>
+              </a:ext>
+            </a:extLst>
+          </p:cNvPr>
+          <p:cNvSpPr>
+            <a:spLocks xmlns:a="http://schemas.openxmlformats.org/drawingml/2006/main" noGrp="1"/>
+          </p:cNvSpPr>
+          <p:nvPr/>
+        </p:nvSpPr>
+        <p:spPr>
+          <a:xfrm xmlns:a="http://schemas.openxmlformats.org/drawingml/2006/main">
+            <a:off x="3476625" y="2724150"/>
+            <a:ext cx="5238750" cy="2114550"/>
+          </a:xfrm>
+          <a:prstGeom xmlns:a="http://schemas.openxmlformats.org/drawingml/2006/main" prst="ellipse">
+            <a:avLst/>
+          </a:prstGeom>
+          <a:gradFill xmlns:a="http://schemas.openxmlformats.org/drawingml/2006/main">
+            <a:gsLst>
+              <a:gs pos="0">
+                <a:srgbClr val="2E78B6"/>
+              </a:gs>
+              <a:gs pos="100000">
+                <a:srgbClr val="123F69"/>
+              </a:gs>
+            </a:gsLst>
+            <a:lin ang="10800000"/>
+          </a:gradFill>
           <a:ln xmlns:a="http://schemas.openxmlformats.org/drawingml/2006/main" w="19050">
             <a:solidFill>
-              <a:srgbClr val="D8EAF7"/>
+              <a:srgbClr val="8CBCE4"/>
+            </a:solidFill>
+            <a:prstDash val="solid"/>
+          </a:ln>
+        </p:spPr>
+        <p:style>
+          <a:lnRef xmlns:a="http://schemas.openxmlformats.org/drawingml/2006/main" idx="0"/>
+          <a:fillRef xmlns:a="http://schemas.openxmlformats.org/drawingml/2006/main" idx="0"/>
+          <a:effectRef xmlns:a="http://schemas.openxmlformats.org/drawingml/2006/main" idx="7"/>
+          <a:fontRef xmlns:a="http://schemas.openxmlformats.org/drawingml/2006/main" idx="major"/>
+        </p:style>
+      </p:sp>
+      <p:sp>
+        <p:nvSpPr>
+          <p:cNvPr id="7" name="">
+            <a:extLst xmlns:a="http://schemas.openxmlformats.org/drawingml/2006/main">
+              <a:ext uri="{FF2B5EF4-FFF2-40B4-BE49-F238E27FC236}">
+                <a16:creationId xmlns:a16="http://schemas.microsoft.com/office/drawing/2014/main" id="{FD596738-E1EC-4661-AC22-355ABEBE146C}"/>
+              </a:ext>
+            </a:extLst>
+          </p:cNvPr>
+          <p:cNvSpPr>
+            <a:spLocks xmlns:a="http://schemas.openxmlformats.org/drawingml/2006/main" noGrp="1"/>
+          </p:cNvSpPr>
+          <p:nvPr/>
+        </p:nvSpPr>
+        <p:spPr>
+          <a:xfrm xmlns:a="http://schemas.openxmlformats.org/drawingml/2006/main">
+            <a:off x="4076700" y="3086100"/>
+            <a:ext cx="4038600" cy="1466850"/>
+          </a:xfrm>
+          <a:prstGeom xmlns:a="http://schemas.openxmlformats.org/drawingml/2006/main" prst="ellipse">
+            <a:avLst/>
+          </a:prstGeom>
+          <a:gradFill xmlns:a="http://schemas.openxmlformats.org/drawingml/2006/main">
+            <a:gsLst>
+              <a:gs pos="0">
+                <a:srgbClr val="1A527E"/>
+              </a:gs>
+              <a:gs pos="100000">
+                <a:srgbClr val="0E3457"/>
+              </a:gs>
+            </a:gsLst>
+            <a:lin ang="10800000"/>
+          </a:gradFill>
+          <a:ln xmlns:a="http://schemas.openxmlformats.org/drawingml/2006/main" w="9525">
+            <a:solidFill>
+              <a:srgbClr val="5B9FD2"/>
             </a:solidFill>
             <a:prstDash val="solid"/>
           </a:ln>
@@ -1209,10 +1388,10 @@
       </p:sp>
       <p:sp>
         <p:nvSpPr>
-          <p:cNvPr id="4" name="">
+          <p:cNvPr id="8" name="">
             <a:extLst xmlns:a="http://schemas.openxmlformats.org/drawingml/2006/main">
               <a:ext uri="{FF2B5EF4-FFF2-40B4-BE49-F238E27FC236}">
-                <a16:creationId xmlns:a16="http://schemas.microsoft.com/office/drawing/2014/main" id="{90828FA6-B506-4A99-8B33-CF8966E3A782}"/>
+                <a16:creationId xmlns:a16="http://schemas.microsoft.com/office/drawing/2014/main" id="{7A84D21B-757D-4D39-906F-EE3115B8DF02}"/>
               </a:ext>
             </a:extLst>
           </p:cNvPr>
@@ -1223,79 +1402,7 @@
         </p:nvSpPr>
         <p:spPr>
           <a:xfrm xmlns:a="http://schemas.openxmlformats.org/drawingml/2006/main">
-            <a:off x="2095500" y="2381250"/>
-            <a:ext cx="8001000" cy="2762250"/>
-          </a:xfrm>
-          <a:prstGeom xmlns:a="http://schemas.openxmlformats.org/drawingml/2006/main" prst="ellipse">
-            <a:avLst/>
-          </a:prstGeom>
-          <a:solidFill xmlns:a="http://schemas.openxmlformats.org/drawingml/2006/main">
-            <a:srgbClr val="F7FAFC"/>
-          </a:solidFill>
-          <a:ln xmlns:a="http://schemas.openxmlformats.org/drawingml/2006/main" w="19050">
-            <a:solidFill>
-              <a:srgbClr val="E0B18E"/>
-            </a:solidFill>
-            <a:prstDash val="solid"/>
-          </a:ln>
-        </p:spPr>
-      </p:sp>
-      <p:sp>
-        <p:nvSpPr>
-          <p:cNvPr id="5" name="">
-            <a:extLst xmlns:a="http://schemas.openxmlformats.org/drawingml/2006/main">
-              <a:ext uri="{FF2B5EF4-FFF2-40B4-BE49-F238E27FC236}">
-                <a16:creationId xmlns:a16="http://schemas.microsoft.com/office/drawing/2014/main" id="{BD52EFC1-43C7-46F8-A522-A8DE9414D708}"/>
-              </a:ext>
-            </a:extLst>
-          </p:cNvPr>
-          <p:cNvSpPr>
-            <a:spLocks xmlns:a="http://schemas.openxmlformats.org/drawingml/2006/main" noGrp="1"/>
-          </p:cNvSpPr>
-          <p:nvPr/>
-        </p:nvSpPr>
-        <p:spPr>
-          <a:xfrm xmlns:a="http://schemas.openxmlformats.org/drawingml/2006/main">
-            <a:off x="3638550" y="2781300"/>
-            <a:ext cx="4914900" cy="1962150"/>
-          </a:xfrm>
-          <a:prstGeom xmlns:a="http://schemas.openxmlformats.org/drawingml/2006/main" prst="ellipse">
-            <a:avLst/>
-          </a:prstGeom>
-          <a:solidFill xmlns:a="http://schemas.openxmlformats.org/drawingml/2006/main">
-            <a:srgbClr val="174A75"/>
-          </a:solidFill>
-          <a:ln xmlns:a="http://schemas.openxmlformats.org/drawingml/2006/main" w="19050">
-            <a:solidFill>
-              <a:srgbClr val="8CBCE4"/>
-            </a:solidFill>
-            <a:prstDash val="solid"/>
-          </a:ln>
-        </p:spPr>
-        <p:style>
-          <a:lnRef xmlns:a="http://schemas.openxmlformats.org/drawingml/2006/main" idx="0"/>
-          <a:fillRef xmlns:a="http://schemas.openxmlformats.org/drawingml/2006/main" idx="0"/>
-          <a:effectRef xmlns:a="http://schemas.openxmlformats.org/drawingml/2006/main" idx="6"/>
-          <a:fontRef xmlns:a="http://schemas.openxmlformats.org/drawingml/2006/main" idx="major"/>
-        </p:style>
-      </p:sp>
-      <p:sp>
-        <p:nvSpPr>
-          <p:cNvPr id="6" name="">
-            <a:extLst xmlns:a="http://schemas.openxmlformats.org/drawingml/2006/main">
-              <a:ext uri="{FF2B5EF4-FFF2-40B4-BE49-F238E27FC236}">
-                <a16:creationId xmlns:a16="http://schemas.microsoft.com/office/drawing/2014/main" id="{4F2471B5-0051-4689-8308-3C067C71FC59}"/>
-              </a:ext>
-            </a:extLst>
-          </p:cNvPr>
-          <p:cNvSpPr>
-            <a:spLocks xmlns:a="http://schemas.openxmlformats.org/drawingml/2006/main" noGrp="1"/>
-          </p:cNvSpPr>
-          <p:nvPr/>
-        </p:nvSpPr>
-        <p:spPr>
-          <a:xfrm xmlns:a="http://schemas.openxmlformats.org/drawingml/2006/main">
-            <a:off x="4476750" y="3257550"/>
+            <a:off x="4476750" y="3295650"/>
             <a:ext cx="3238500" cy="952500"/>
           </a:xfrm>
           <a:prstGeom xmlns:a="http://schemas.openxmlformats.org/drawingml/2006/main" prst="rect">
@@ -1362,10 +1469,10 @@
       </p:sp>
       <p:sp>
         <p:nvSpPr>
-          <p:cNvPr id="7" name="">
+          <p:cNvPr id="9" name="PPAGENT_QA|parent=capability-0|domains=capability-nodes">
             <a:extLst xmlns:a="http://schemas.openxmlformats.org/drawingml/2006/main">
               <a:ext uri="{FF2B5EF4-FFF2-40B4-BE49-F238E27FC236}">
-                <a16:creationId xmlns:a16="http://schemas.microsoft.com/office/drawing/2014/main" id="{74BDAEF0-48EE-466B-93D5-40EC356E684B}"/>
+                <a16:creationId xmlns:a16="http://schemas.microsoft.com/office/drawing/2014/main" id="{02252A07-BFE2-4794-B96D-64372D424E6B}"/>
               </a:ext>
             </a:extLst>
           </p:cNvPr>
@@ -1376,15 +1483,23 @@
         </p:nvSpPr>
         <p:spPr>
           <a:xfrm xmlns:a="http://schemas.openxmlformats.org/drawingml/2006/main">
-            <a:off x="5600700" y="1600200"/>
-            <a:ext cx="990600" cy="800100"/>
+            <a:off x="5638800" y="1485900"/>
+            <a:ext cx="914400" cy="800100"/>
           </a:xfrm>
           <a:prstGeom xmlns:a="http://schemas.openxmlformats.org/drawingml/2006/main" prst="ellipse">
             <a:avLst/>
           </a:prstGeom>
-          <a:solidFill xmlns:a="http://schemas.openxmlformats.org/drawingml/2006/main">
-            <a:srgbClr val="E1AA80"/>
-          </a:solidFill>
+          <a:gradFill xmlns:a="http://schemas.openxmlformats.org/drawingml/2006/main">
+            <a:gsLst>
+              <a:gs pos="0">
+                <a:srgbClr val="EAB58E"/>
+              </a:gs>
+              <a:gs pos="100000">
+                <a:srgbClr val="D88952"/>
+              </a:gs>
+            </a:gsLst>
+            <a:lin ang="8100000"/>
+          </a:gradFill>
           <a:ln xmlns:a="http://schemas.openxmlformats.org/drawingml/2006/main" w="14288">
             <a:solidFill>
               <a:srgbClr val="FFFFFF"/>
@@ -1399,7 +1514,7 @@
           <a:fontRef xmlns:a="http://schemas.openxmlformats.org/drawingml/2006/main" idx="major"/>
         </p:style>
         <p:txBody>
-          <a:bodyPr xmlns:a="http://schemas.openxmlformats.org/drawingml/2006/main" lIns="114300" tIns="76200" rIns="114300" bIns="76200" anchor="ctr">
+          <a:bodyPr xmlns:a="http://schemas.openxmlformats.org/drawingml/2006/main" lIns="66675" tIns="38100" rIns="66675" bIns="38100" anchor="ctr">
             <a:normAutofit fontScale="100000"/>
           </a:bodyPr>
           <a:lstStyle xmlns:a="http://schemas.openxmlformats.org/drawingml/2006/main"/>
@@ -1430,10 +1545,10 @@
       </p:sp>
       <p:sp>
         <p:nvSpPr>
-          <p:cNvPr id="8" name="">
+          <p:cNvPr id="10" name="PPAGENT_QA|parent=capability-1|domains=capability-nodes">
             <a:extLst xmlns:a="http://schemas.openxmlformats.org/drawingml/2006/main">
               <a:ext uri="{FF2B5EF4-FFF2-40B4-BE49-F238E27FC236}">
-                <a16:creationId xmlns:a16="http://schemas.microsoft.com/office/drawing/2014/main" id="{BE7A2690-F5D1-411D-80E9-1C422EA51494}"/>
+                <a16:creationId xmlns:a16="http://schemas.microsoft.com/office/drawing/2014/main" id="{4699BF47-1F58-4493-98C2-66BC64CF268F}"/>
               </a:ext>
             </a:extLst>
           </p:cNvPr>
@@ -1444,15 +1559,23 @@
         </p:nvSpPr>
         <p:spPr>
           <a:xfrm xmlns:a="http://schemas.openxmlformats.org/drawingml/2006/main">
-            <a:off x="9477679" y="2481263"/>
-            <a:ext cx="990600" cy="800100"/>
+            <a:off x="9804490" y="2390775"/>
+            <a:ext cx="914400" cy="800100"/>
           </a:xfrm>
           <a:prstGeom xmlns:a="http://schemas.openxmlformats.org/drawingml/2006/main" prst="ellipse">
             <a:avLst/>
           </a:prstGeom>
-          <a:solidFill xmlns:a="http://schemas.openxmlformats.org/drawingml/2006/main">
-            <a:srgbClr val="E1AA80"/>
-          </a:solidFill>
+          <a:gradFill xmlns:a="http://schemas.openxmlformats.org/drawingml/2006/main">
+            <a:gsLst>
+              <a:gs pos="0">
+                <a:srgbClr val="EAB58E"/>
+              </a:gs>
+              <a:gs pos="100000">
+                <a:srgbClr val="D88952"/>
+              </a:gs>
+            </a:gsLst>
+            <a:lin ang="8100000"/>
+          </a:gradFill>
           <a:ln xmlns:a="http://schemas.openxmlformats.org/drawingml/2006/main" w="14288">
             <a:solidFill>
               <a:srgbClr val="FFFFFF"/>
@@ -1467,7 +1590,7 @@
           <a:fontRef xmlns:a="http://schemas.openxmlformats.org/drawingml/2006/main" idx="major"/>
         </p:style>
         <p:txBody>
-          <a:bodyPr xmlns:a="http://schemas.openxmlformats.org/drawingml/2006/main" lIns="114300" tIns="76200" rIns="114300" bIns="76200" anchor="ctr">
+          <a:bodyPr xmlns:a="http://schemas.openxmlformats.org/drawingml/2006/main" lIns="66675" tIns="38100" rIns="66675" bIns="38100" anchor="ctr">
             <a:normAutofit fontScale="100000"/>
           </a:bodyPr>
           <a:lstStyle xmlns:a="http://schemas.openxmlformats.org/drawingml/2006/main"/>
@@ -1498,10 +1621,10 @@
       </p:sp>
       <p:sp>
         <p:nvSpPr>
-          <p:cNvPr id="9" name="">
+          <p:cNvPr id="11" name="PPAGENT_QA|parent=capability-2|domains=capability-nodes">
             <a:extLst xmlns:a="http://schemas.openxmlformats.org/drawingml/2006/main">
               <a:ext uri="{FF2B5EF4-FFF2-40B4-BE49-F238E27FC236}">
-                <a16:creationId xmlns:a16="http://schemas.microsoft.com/office/drawing/2014/main" id="{0F8547E3-062E-4208-8621-AA41D69C6082}"/>
+                <a16:creationId xmlns:a16="http://schemas.microsoft.com/office/drawing/2014/main" id="{AAEB50E0-63FB-4EFC-9C2C-17D3031E7E01}"/>
               </a:ext>
             </a:extLst>
           </p:cNvPr>
@@ -1512,15 +1635,23 @@
         </p:nvSpPr>
         <p:spPr>
           <a:xfrm xmlns:a="http://schemas.openxmlformats.org/drawingml/2006/main">
-            <a:off x="9477679" y="4243388"/>
-            <a:ext cx="990600" cy="800100"/>
+            <a:off x="9804490" y="4200525"/>
+            <a:ext cx="914400" cy="800100"/>
           </a:xfrm>
           <a:prstGeom xmlns:a="http://schemas.openxmlformats.org/drawingml/2006/main" prst="ellipse">
             <a:avLst/>
           </a:prstGeom>
-          <a:solidFill xmlns:a="http://schemas.openxmlformats.org/drawingml/2006/main">
-            <a:srgbClr val="E1AA80"/>
-          </a:solidFill>
+          <a:gradFill xmlns:a="http://schemas.openxmlformats.org/drawingml/2006/main">
+            <a:gsLst>
+              <a:gs pos="0">
+                <a:srgbClr val="EAB58E"/>
+              </a:gs>
+              <a:gs pos="100000">
+                <a:srgbClr val="D88952"/>
+              </a:gs>
+            </a:gsLst>
+            <a:lin ang="8100000"/>
+          </a:gradFill>
           <a:ln xmlns:a="http://schemas.openxmlformats.org/drawingml/2006/main" w="14288">
             <a:solidFill>
               <a:srgbClr val="FFFFFF"/>
@@ -1535,7 +1666,7 @@
           <a:fontRef xmlns:a="http://schemas.openxmlformats.org/drawingml/2006/main" idx="major"/>
         </p:style>
         <p:txBody>
-          <a:bodyPr xmlns:a="http://schemas.openxmlformats.org/drawingml/2006/main" lIns="114300" tIns="76200" rIns="114300" bIns="76200" anchor="ctr">
+          <a:bodyPr xmlns:a="http://schemas.openxmlformats.org/drawingml/2006/main" lIns="66675" tIns="38100" rIns="66675" bIns="38100" anchor="ctr">
             <a:normAutofit fontScale="100000"/>
           </a:bodyPr>
           <a:lstStyle xmlns:a="http://schemas.openxmlformats.org/drawingml/2006/main"/>
@@ -1566,10 +1697,10 @@
       </p:sp>
       <p:sp>
         <p:nvSpPr>
-          <p:cNvPr id="10" name="">
+          <p:cNvPr id="12" name="PPAGENT_QA|parent=capability-3|domains=capability-nodes">
             <a:extLst xmlns:a="http://schemas.openxmlformats.org/drawingml/2006/main">
               <a:ext uri="{FF2B5EF4-FFF2-40B4-BE49-F238E27FC236}">
-                <a16:creationId xmlns:a16="http://schemas.microsoft.com/office/drawing/2014/main" id="{E83CD68F-F823-4AF6-AE42-0B0E0A17E3B4}"/>
+                <a16:creationId xmlns:a16="http://schemas.microsoft.com/office/drawing/2014/main" id="{004519E4-4E1C-4467-B1B0-ABAC0843F6F2}"/>
               </a:ext>
             </a:extLst>
           </p:cNvPr>
@@ -1580,15 +1711,23 @@
         </p:nvSpPr>
         <p:spPr>
           <a:xfrm xmlns:a="http://schemas.openxmlformats.org/drawingml/2006/main">
-            <a:off x="5600700" y="5124450"/>
-            <a:ext cx="990600" cy="800100"/>
+            <a:off x="5638800" y="5105400"/>
+            <a:ext cx="914400" cy="800100"/>
           </a:xfrm>
           <a:prstGeom xmlns:a="http://schemas.openxmlformats.org/drawingml/2006/main" prst="ellipse">
             <a:avLst/>
           </a:prstGeom>
-          <a:solidFill xmlns:a="http://schemas.openxmlformats.org/drawingml/2006/main">
-            <a:srgbClr val="E1AA80"/>
-          </a:solidFill>
+          <a:gradFill xmlns:a="http://schemas.openxmlformats.org/drawingml/2006/main">
+            <a:gsLst>
+              <a:gs pos="0">
+                <a:srgbClr val="EAB58E"/>
+              </a:gs>
+              <a:gs pos="100000">
+                <a:srgbClr val="D88952"/>
+              </a:gs>
+            </a:gsLst>
+            <a:lin ang="8100000"/>
+          </a:gradFill>
           <a:ln xmlns:a="http://schemas.openxmlformats.org/drawingml/2006/main" w="14288">
             <a:solidFill>
               <a:srgbClr val="FFFFFF"/>
@@ -1603,7 +1742,7 @@
           <a:fontRef xmlns:a="http://schemas.openxmlformats.org/drawingml/2006/main" idx="major"/>
         </p:style>
         <p:txBody>
-          <a:bodyPr xmlns:a="http://schemas.openxmlformats.org/drawingml/2006/main" lIns="114300" tIns="76200" rIns="114300" bIns="76200" anchor="ctr">
+          <a:bodyPr xmlns:a="http://schemas.openxmlformats.org/drawingml/2006/main" lIns="66675" tIns="38100" rIns="66675" bIns="38100" anchor="ctr">
             <a:normAutofit fontScale="100000"/>
           </a:bodyPr>
           <a:lstStyle xmlns:a="http://schemas.openxmlformats.org/drawingml/2006/main"/>
@@ -1634,10 +1773,10 @@
       </p:sp>
       <p:sp>
         <p:nvSpPr>
-          <p:cNvPr id="11" name="">
+          <p:cNvPr id="13" name="PPAGENT_QA|parent=capability-4|domains=capability-nodes">
             <a:extLst xmlns:a="http://schemas.openxmlformats.org/drawingml/2006/main">
               <a:ext uri="{FF2B5EF4-FFF2-40B4-BE49-F238E27FC236}">
-                <a16:creationId xmlns:a16="http://schemas.microsoft.com/office/drawing/2014/main" id="{8E8DBDC8-F68E-45CE-B6B0-9BB454086B42}"/>
+                <a16:creationId xmlns:a16="http://schemas.microsoft.com/office/drawing/2014/main" id="{210BB25C-90F0-41C4-A28D-0E81A60FCC29}"/>
               </a:ext>
             </a:extLst>
           </p:cNvPr>
@@ -1648,15 +1787,23 @@
         </p:nvSpPr>
         <p:spPr>
           <a:xfrm xmlns:a="http://schemas.openxmlformats.org/drawingml/2006/main">
-            <a:off x="1723721" y="4243388"/>
-            <a:ext cx="990600" cy="800100"/>
+            <a:off x="1473110" y="4200525"/>
+            <a:ext cx="914400" cy="800100"/>
           </a:xfrm>
           <a:prstGeom xmlns:a="http://schemas.openxmlformats.org/drawingml/2006/main" prst="ellipse">
             <a:avLst/>
           </a:prstGeom>
-          <a:solidFill xmlns:a="http://schemas.openxmlformats.org/drawingml/2006/main">
-            <a:srgbClr val="E1AA80"/>
-          </a:solidFill>
+          <a:gradFill xmlns:a="http://schemas.openxmlformats.org/drawingml/2006/main">
+            <a:gsLst>
+              <a:gs pos="0">
+                <a:srgbClr val="EAB58E"/>
+              </a:gs>
+              <a:gs pos="100000">
+                <a:srgbClr val="D88952"/>
+              </a:gs>
+            </a:gsLst>
+            <a:lin ang="8100000"/>
+          </a:gradFill>
           <a:ln xmlns:a="http://schemas.openxmlformats.org/drawingml/2006/main" w="14288">
             <a:solidFill>
               <a:srgbClr val="FFFFFF"/>
@@ -1671,7 +1818,7 @@
           <a:fontRef xmlns:a="http://schemas.openxmlformats.org/drawingml/2006/main" idx="major"/>
         </p:style>
         <p:txBody>
-          <a:bodyPr xmlns:a="http://schemas.openxmlformats.org/drawingml/2006/main" lIns="114300" tIns="76200" rIns="114300" bIns="76200" anchor="ctr">
+          <a:bodyPr xmlns:a="http://schemas.openxmlformats.org/drawingml/2006/main" lIns="66675" tIns="38100" rIns="66675" bIns="38100" anchor="ctr">
             <a:normAutofit fontScale="100000"/>
           </a:bodyPr>
           <a:lstStyle xmlns:a="http://schemas.openxmlformats.org/drawingml/2006/main"/>
@@ -1702,10 +1849,10 @@
       </p:sp>
       <p:sp>
         <p:nvSpPr>
-          <p:cNvPr id="12" name="">
+          <p:cNvPr id="14" name="PPAGENT_QA|parent=capability-5|domains=capability-nodes">
             <a:extLst xmlns:a="http://schemas.openxmlformats.org/drawingml/2006/main">
               <a:ext uri="{FF2B5EF4-FFF2-40B4-BE49-F238E27FC236}">
-                <a16:creationId xmlns:a16="http://schemas.microsoft.com/office/drawing/2014/main" id="{29A9505C-B556-4EEF-8929-801AF028C95F}"/>
+                <a16:creationId xmlns:a16="http://schemas.microsoft.com/office/drawing/2014/main" id="{7134DF1F-B814-4315-B820-3F6F94A14122}"/>
               </a:ext>
             </a:extLst>
           </p:cNvPr>
@@ -1716,15 +1863,23 @@
         </p:nvSpPr>
         <p:spPr>
           <a:xfrm xmlns:a="http://schemas.openxmlformats.org/drawingml/2006/main">
-            <a:off x="1723721" y="2481263"/>
-            <a:ext cx="990600" cy="800100"/>
+            <a:off x="1473110" y="2390775"/>
+            <a:ext cx="914400" cy="800100"/>
           </a:xfrm>
           <a:prstGeom xmlns:a="http://schemas.openxmlformats.org/drawingml/2006/main" prst="ellipse">
             <a:avLst/>
           </a:prstGeom>
-          <a:solidFill xmlns:a="http://schemas.openxmlformats.org/drawingml/2006/main">
-            <a:srgbClr val="E1AA80"/>
-          </a:solidFill>
+          <a:gradFill xmlns:a="http://schemas.openxmlformats.org/drawingml/2006/main">
+            <a:gsLst>
+              <a:gs pos="0">
+                <a:srgbClr val="EAB58E"/>
+              </a:gs>
+              <a:gs pos="100000">
+                <a:srgbClr val="D88952"/>
+              </a:gs>
+            </a:gsLst>
+            <a:lin ang="8100000"/>
+          </a:gradFill>
           <a:ln xmlns:a="http://schemas.openxmlformats.org/drawingml/2006/main" w="14288">
             <a:solidFill>
               <a:srgbClr val="FFFFFF"/>
@@ -1739,7 +1894,7 @@
           <a:fontRef xmlns:a="http://schemas.openxmlformats.org/drawingml/2006/main" idx="major"/>
         </p:style>
         <p:txBody>
-          <a:bodyPr xmlns:a="http://schemas.openxmlformats.org/drawingml/2006/main" lIns="114300" tIns="76200" rIns="114300" bIns="76200" anchor="ctr">
+          <a:bodyPr xmlns:a="http://schemas.openxmlformats.org/drawingml/2006/main" lIns="66675" tIns="38100" rIns="66675" bIns="38100" anchor="ctr">
             <a:normAutofit fontScale="100000"/>
           </a:bodyPr>
           <a:lstStyle xmlns:a="http://schemas.openxmlformats.org/drawingml/2006/main"/>
@@ -1771,7 +1926,7 @@
     </p:spTree>
     <p:extLst>
       <p:ext uri="{BB962C8B-B14F-4D97-AF65-F5344CB8AC3E}">
-        <p14:creationId xmlns:p14="http://schemas.microsoft.com/office/powerpoint/2010/main" val="1366019084"/>
+        <p14:creationId xmlns:p14="http://schemas.microsoft.com/office/powerpoint/2010/main" val="1552938412"/>
       </p:ext>
     </p:extLst>
   </p:cSld>
